--- a/public/fun/pack/pptx/newspro/카드뉴스프리미엄_49_감사·칭찬_스노우포레스트.pptx
+++ b/public/fun/pack/pptx/newspro/카드뉴스프리미엄_49_감사·칭찬_스노우포레스트.pptx
@@ -113,12 +113,12 @@
   <p:extLst>
     <p:ext uri="{521415D9-36F7-43E2-AB2F-B90AF26B5E84}">
       <p14:sectionLst xmlns:p14="http://schemas.microsoft.com/office/powerpoint/2010/main">
-        <p14:section name="시작" id="{4449C85D-3673-4C17-AA10-03FAD4B46256}">
+        <p14:section name="시작" id="{60942AC6-6756-4478-801D-34FE64E39404}">
           <p14:sldIdLst>
             <p14:sldId id="256"/>
           </p14:sldIdLst>
         </p14:section>
-        <p14:section name="본문" id="{AB4DB276-5762-46B8-8172-12AFF7FAAF83}">
+        <p14:section name="본문" id="{1C4421F9-673E-43B1-99F0-1B2456308648}">
           <p14:sldIdLst>
             <p14:sldId id="257"/>
             <p14:sldId id="258"/>
@@ -127,7 +127,7 @@
             <p14:sldId id="261"/>
           </p14:sldIdLst>
         </p14:section>
-        <p14:section name="마무리" id="{06E8AEB7-EE1B-484F-9074-D540CB3534E4}">
+        <p14:section name="마무리" id="{F149B423-E1C6-4C25-AA4D-1E62BCDCCCF0}">
           <p14:sldIdLst>
             <p14:sldId id="262"/>
           </p14:sldIdLst>
@@ -1501,7 +1501,7 @@
             </a:lvl1pPr>
           </a:lstStyle>
           <a:p>
-            <a:fld id="{2A81E64E-681A-400C-8017-3F33084307C0}" type="slidenum">
+            <a:fld id="{2E54D7B5-5736-462A-B38B-A3A2224CBD9B}" type="slidenum">
               <a:rPr lang="en-US"/>
               <a:t>‹#›</a:t>
             </a:fld>
@@ -2151,7 +2151,7 @@
             </a:lvl1pPr>
           </a:lstStyle>
           <a:p>
-            <a:fld id="{EC26B62A-4913-481D-9311-3C31C9F8C62A}" type="slidenum">
+            <a:fld id="{C0AA1C99-3C8C-410D-A59C-28403222F9D3}" type="slidenum">
               <a:rPr lang="en-US"/>
               <a:t>‹#›</a:t>
             </a:fld>
@@ -2821,7 +2821,7 @@
             </a:lvl1pPr>
           </a:lstStyle>
           <a:p>
-            <a:fld id="{E791D4A9-8047-4F1F-A67D-0403CC64DDBE}" type="slidenum">
+            <a:fld id="{B60044B6-6EEE-49D9-8809-C6617919CC7E}" type="slidenum">
               <a:rPr lang="en-US"/>
               <a:t>‹#›</a:t>
             </a:fld>
@@ -3640,7 +3640,7 @@
           <a:p>
             <a:r>
               <a:rPr lang="ko-KR"/>
-              <a:t>새해 첫 인사는 고마움으로</a:t>
+              <a:t>첫 인사는 고마움으로</a:t>
             </a:r>
           </a:p>
         </p:txBody>
@@ -3769,7 +3769,7 @@
           <a:bodyPr/>
           <a:lstStyle/>
           <a:p>
-            <a:fld id="{2C5EDA4B-A756-4101-8187-4C954334B1E4}" type="slidenum">
+            <a:fld id="{155C71C2-7986-421B-ACCD-92F64FD403E4}" type="slidenum">
               <a:rPr lang="en-US"/>
               <a:t>‹#›</a:t>
             </a:fld>
@@ -3935,7 +3935,7 @@
           <a:bodyPr/>
           <a:lstStyle/>
           <a:p>
-            <a:fld id="{E48AD6BA-2F2B-4B71-B73B-AEC87D933C46}" type="slidenum">
+            <a:fld id="{E80AFC0A-FACB-4FE5-BD4C-A6E7423D3658}" type="slidenum">
               <a:rPr lang="en-US"/>
               <a:t>‹#›</a:t>
             </a:fld>
@@ -4101,7 +4101,7 @@
           <a:bodyPr/>
           <a:lstStyle/>
           <a:p>
-            <a:fld id="{F5A76C70-95B2-486D-9DEF-EF25F06AEB37}" type="slidenum">
+            <a:fld id="{3EB75339-43D4-4CED-9710-761A57894DBD}" type="slidenum">
               <a:rPr lang="en-US"/>
               <a:t>‹#›</a:t>
             </a:fld>
@@ -4267,7 +4267,7 @@
           <a:bodyPr/>
           <a:lstStyle/>
           <a:p>
-            <a:fld id="{2B544C82-806B-4AF7-BD75-25A75B9CDFB1}" type="slidenum">
+            <a:fld id="{7B2D7EFA-FC30-40F8-A590-43E9F6449ADB}" type="slidenum">
               <a:rPr lang="en-US"/>
               <a:t>‹#›</a:t>
             </a:fld>
@@ -4433,7 +4433,7 @@
           <a:bodyPr/>
           <a:lstStyle/>
           <a:p>
-            <a:fld id="{2F390B5C-BD65-4094-9D52-14E86B037EC6}" type="slidenum">
+            <a:fld id="{D8E54FD8-D2D5-4853-AAA2-C0B6D951C351}" type="slidenum">
               <a:rPr lang="en-US"/>
               <a:t>‹#›</a:t>
             </a:fld>
